--- a/presentation/Разработка Android-приложения для учёта поступления и расхода товаров на складе.pptx
+++ b/presentation/Разработка Android-приложения для учёта поступления и расхода товаров на складе.pptx
@@ -5,30 +5,31 @@
     <p:sldMasterId id="2147483648" r:id="rId1"/>
   </p:sldMasterIdLst>
   <p:notesMasterIdLst>
-    <p:notesMasterId r:id="rId12"/>
+    <p:notesMasterId r:id="rId13"/>
   </p:notesMasterIdLst>
   <p:sldIdLst>
     <p:sldId id="257" r:id="rId2"/>
-    <p:sldId id="259" r:id="rId3"/>
-    <p:sldId id="260" r:id="rId4"/>
-    <p:sldId id="263" r:id="rId5"/>
-    <p:sldId id="261" r:id="rId6"/>
-    <p:sldId id="262" r:id="rId7"/>
-    <p:sldId id="264" r:id="rId8"/>
-    <p:sldId id="265" r:id="rId9"/>
-    <p:sldId id="266" r:id="rId10"/>
-    <p:sldId id="267" r:id="rId11"/>
+    <p:sldId id="268" r:id="rId3"/>
+    <p:sldId id="259" r:id="rId4"/>
+    <p:sldId id="260" r:id="rId5"/>
+    <p:sldId id="263" r:id="rId6"/>
+    <p:sldId id="261" r:id="rId7"/>
+    <p:sldId id="262" r:id="rId8"/>
+    <p:sldId id="264" r:id="rId9"/>
+    <p:sldId id="265" r:id="rId10"/>
+    <p:sldId id="266" r:id="rId11"/>
+    <p:sldId id="267" r:id="rId12"/>
   </p:sldIdLst>
   <p:sldSz cx="12192000" cy="6858000"/>
   <p:notesSz cx="6858000" cy="9144000"/>
   <p:embeddedFontLst>
     <p:embeddedFont>
       <p:font typeface="SamsungOne 450C" panose="020B0506030303020204" charset="0"/>
-      <p:regular r:id="rId13"/>
+      <p:regular r:id="rId14"/>
     </p:embeddedFont>
     <p:embeddedFont>
       <p:font typeface="SamsungOne 800C" panose="020B0906030303020204" charset="0"/>
-      <p:bold r:id="rId14"/>
+      <p:bold r:id="rId15"/>
     </p:embeddedFont>
   </p:embeddedFontLst>
   <p:defaultTextStyle>
@@ -216,7 +217,7 @@
           <a:p>
             <a:fld id="{0D3D64DB-6921-4E89-BB57-DA51E8424924}" type="datetimeFigureOut">
               <a:rPr lang="ru-RU" smtClean="0"/>
-              <a:t>01.05.2026</a:t>
+              <a:t>02.05.2026</a:t>
             </a:fld>
             <a:endParaRPr lang="ru-RU"/>
           </a:p>
@@ -705,7 +706,7 @@
             <a:fld id="{112B0F4B-37E6-4319-8F4B-24D1060A079B}" type="datetime1">
               <a:rPr lang="ru-RU" smtClean="0"/>
               <a:pPr/>
-              <a:t>01.05.2026</a:t>
+              <a:t>02.05.2026</a:t>
             </a:fld>
             <a:endParaRPr lang="ru-RU" dirty="0"/>
           </a:p>
@@ -2388,7 +2389,7 @@
             <a:fld id="{112B0F4B-37E6-4319-8F4B-24D1060A079B}" type="datetime1">
               <a:rPr lang="ru-RU" smtClean="0"/>
               <a:pPr/>
-              <a:t>01.05.2026</a:t>
+              <a:t>02.05.2026</a:t>
             </a:fld>
             <a:endParaRPr lang="ru-RU" dirty="0"/>
           </a:p>
@@ -3244,7 +3245,7 @@
           <a:p>
             <a:fld id="{7D4B0392-6652-4E63-9185-19FE4105AD5C}" type="datetime1">
               <a:rPr lang="ru-RU" smtClean="0"/>
-              <a:t>01.05.2026</a:t>
+              <a:t>02.05.2026</a:t>
             </a:fld>
             <a:endParaRPr lang="ru-RU"/>
           </a:p>
@@ -3775,7 +3776,7 @@
           <a:p>
             <a:fld id="{C7D3F048-DFDB-4194-AEE4-02DDD855F7A2}" type="datetime1">
               <a:rPr lang="ru-RU" smtClean="0"/>
-              <a:t>01.05.2026</a:t>
+              <a:t>02.05.2026</a:t>
             </a:fld>
             <a:endParaRPr lang="ru-RU"/>
           </a:p>
@@ -3882,7 +3883,7 @@
           <p:cNvPr id="2" name="Объект 1">
             <a:extLst>
               <a:ext uri="{FF2B5EF4-FFF2-40B4-BE49-F238E27FC236}">
-                <a16:creationId xmlns:a16="http://schemas.microsoft.com/office/drawing/2014/main" id="{B8BF7BEB-3102-30FD-652A-82AB88123905}"/>
+                <a16:creationId xmlns:a16="http://schemas.microsoft.com/office/drawing/2014/main" id="{16DBBE4C-D221-26FF-C469-20DBD08D6805}"/>
               </a:ext>
             </a:extLst>
           </p:cNvPr>
@@ -3902,18 +3903,42 @@
           <a:p>
             <a:r>
               <a:rPr lang="ru-RU" sz="2800" dirty="0"/>
-              <a:t>Проект полностью реализует требования складского учёта</a:t>
+              <a:t>Пользователь видит понятные сообщения об ошибках</a:t>
             </a:r>
           </a:p>
           <a:p>
             <a:r>
               <a:rPr lang="ru-RU" sz="2800" dirty="0"/>
-              <a:t>Готов к расширению</a:t>
-            </a:r>
-          </a:p>
-          <a:p>
+              <a:t>Проверка обязательных полей</a:t>
+            </a:r>
+          </a:p>
+          <a:p>
+            <a:r>
+              <a:rPr lang="ru-RU" sz="2800" dirty="0"/>
+              <a:t>Ограничения количества по остатку</a:t>
+            </a:r>
+          </a:p>
+          <a:p>
+            <a:r>
+              <a:rPr lang="ru-RU" sz="2800" dirty="0"/>
+              <a:t>Нет прямого доступа к данным из UI</a:t>
+            </a:r>
+          </a:p>
+          <a:p>
+            <a:r>
+              <a:rPr lang="ru-RU" sz="2800" dirty="0"/>
+              <a:t>Все операции проходят через контролируемые слои</a:t>
+            </a:r>
+          </a:p>
+          <a:p>
+            <a:pPr marL="0" indent="0">
+              <a:buNone/>
+            </a:pPr>
             <a:endParaRPr lang="ru-RU" sz="2800" dirty="0"/>
           </a:p>
+          <a:p>
+            <a:endParaRPr lang="ru-RU" sz="2800" dirty="0"/>
+          </a:p>
         </p:txBody>
       </p:sp>
       <p:sp>
@@ -3921,7 +3946,7 @@
           <p:cNvPr id="3" name="Дата 2">
             <a:extLst>
               <a:ext uri="{FF2B5EF4-FFF2-40B4-BE49-F238E27FC236}">
-                <a16:creationId xmlns:a16="http://schemas.microsoft.com/office/drawing/2014/main" id="{5E94724E-225E-8428-53F7-7A4102EC34DF}"/>
+                <a16:creationId xmlns:a16="http://schemas.microsoft.com/office/drawing/2014/main" id="{62CBC481-080D-9F65-31A2-32EB39836771}"/>
               </a:ext>
             </a:extLst>
           </p:cNvPr>
@@ -3951,7 +3976,7 @@
           <p:cNvPr id="4" name="Номер слайда 3">
             <a:extLst>
               <a:ext uri="{FF2B5EF4-FFF2-40B4-BE49-F238E27FC236}">
-                <a16:creationId xmlns:a16="http://schemas.microsoft.com/office/drawing/2014/main" id="{5CABC850-9B7A-1F0C-56D3-ECD15AB50002}"/>
+                <a16:creationId xmlns:a16="http://schemas.microsoft.com/office/drawing/2014/main" id="{EA83E5AC-19E2-1531-28DB-8D7273F74430}"/>
               </a:ext>
             </a:extLst>
           </p:cNvPr>
@@ -3971,6 +3996,166 @@
               <a:rPr lang="ru-RU" smtClean="0"/>
               <a:pPr/>
               <a:t>10</a:t>
+            </a:fld>
+            <a:endParaRPr lang="ru-RU"/>
+          </a:p>
+        </p:txBody>
+      </p:sp>
+      <p:sp>
+        <p:nvSpPr>
+          <p:cNvPr id="5" name="Заголовок 4">
+            <a:extLst>
+              <a:ext uri="{FF2B5EF4-FFF2-40B4-BE49-F238E27FC236}">
+                <a16:creationId xmlns:a16="http://schemas.microsoft.com/office/drawing/2014/main" id="{74ABFEB6-1503-4EDF-E551-35A7157DBDDB}"/>
+              </a:ext>
+            </a:extLst>
+          </p:cNvPr>
+          <p:cNvSpPr>
+            <a:spLocks noGrp="1"/>
+          </p:cNvSpPr>
+          <p:nvPr>
+            <p:ph type="title"/>
+          </p:nvPr>
+        </p:nvSpPr>
+        <p:spPr/>
+        <p:txBody>
+          <a:bodyPr>
+            <a:normAutofit/>
+          </a:bodyPr>
+          <a:lstStyle/>
+          <a:p>
+            <a:r>
+              <a:rPr lang="ru-RU" sz="4000" b="1" dirty="0"/>
+              <a:t>Тестирование и надёжность</a:t>
+            </a:r>
+            <a:endParaRPr lang="ru-RU" sz="4000" dirty="0"/>
+          </a:p>
+        </p:txBody>
+      </p:sp>
+    </p:spTree>
+    <p:extLst>
+      <p:ext uri="{BB962C8B-B14F-4D97-AF65-F5344CB8AC3E}">
+        <p14:creationId xmlns:p14="http://schemas.microsoft.com/office/powerpoint/2010/main" val="3943208776"/>
+      </p:ext>
+    </p:extLst>
+  </p:cSld>
+  <p:clrMapOvr>
+    <a:masterClrMapping/>
+  </p:clrMapOvr>
+</p:sld>
+</file>
+
+<file path=ppt/slides/slide11.xml><?xml version="1.0" encoding="utf-8"?>
+<p:sld xmlns:a="http://schemas.openxmlformats.org/drawingml/2006/main" xmlns:r="http://schemas.openxmlformats.org/officeDocument/2006/relationships" xmlns:p="http://schemas.openxmlformats.org/presentationml/2006/main">
+  <p:cSld>
+    <p:spTree>
+      <p:nvGrpSpPr>
+        <p:cNvPr id="1" name=""/>
+        <p:cNvGrpSpPr/>
+        <p:nvPr/>
+      </p:nvGrpSpPr>
+      <p:grpSpPr>
+        <a:xfrm>
+          <a:off x="0" y="0"/>
+          <a:ext cx="0" cy="0"/>
+          <a:chOff x="0" y="0"/>
+          <a:chExt cx="0" cy="0"/>
+        </a:xfrm>
+      </p:grpSpPr>
+      <p:sp>
+        <p:nvSpPr>
+          <p:cNvPr id="2" name="Объект 1">
+            <a:extLst>
+              <a:ext uri="{FF2B5EF4-FFF2-40B4-BE49-F238E27FC236}">
+                <a16:creationId xmlns:a16="http://schemas.microsoft.com/office/drawing/2014/main" id="{B8BF7BEB-3102-30FD-652A-82AB88123905}"/>
+              </a:ext>
+            </a:extLst>
+          </p:cNvPr>
+          <p:cNvSpPr>
+            <a:spLocks noGrp="1"/>
+          </p:cNvSpPr>
+          <p:nvPr>
+            <p:ph idx="1"/>
+          </p:nvPr>
+        </p:nvSpPr>
+        <p:spPr/>
+        <p:txBody>
+          <a:bodyPr>
+            <a:normAutofit/>
+          </a:bodyPr>
+          <a:lstStyle/>
+          <a:p>
+            <a:r>
+              <a:rPr lang="ru-RU" sz="2800" dirty="0"/>
+              <a:t>Проект полностью реализует требования складского учёта</a:t>
+            </a:r>
+          </a:p>
+          <a:p>
+            <a:r>
+              <a:rPr lang="ru-RU" sz="2800" dirty="0"/>
+              <a:t>Готов к расширению</a:t>
+            </a:r>
+          </a:p>
+          <a:p>
+            <a:endParaRPr lang="ru-RU" sz="2800" dirty="0"/>
+          </a:p>
+        </p:txBody>
+      </p:sp>
+      <p:sp>
+        <p:nvSpPr>
+          <p:cNvPr id="3" name="Дата 2">
+            <a:extLst>
+              <a:ext uri="{FF2B5EF4-FFF2-40B4-BE49-F238E27FC236}">
+                <a16:creationId xmlns:a16="http://schemas.microsoft.com/office/drawing/2014/main" id="{5E94724E-225E-8428-53F7-7A4102EC34DF}"/>
+              </a:ext>
+            </a:extLst>
+          </p:cNvPr>
+          <p:cNvSpPr>
+            <a:spLocks noGrp="1"/>
+          </p:cNvSpPr>
+          <p:nvPr>
+            <p:ph type="dt" sz="half" idx="10"/>
+          </p:nvPr>
+        </p:nvSpPr>
+        <p:spPr/>
+        <p:txBody>
+          <a:bodyPr/>
+          <a:lstStyle/>
+          <a:p>
+            <a:fld id="{112B0F4B-37E6-4319-8F4B-24D1060A079B}" type="datetime1">
+              <a:rPr lang="ru-RU" smtClean="0"/>
+              <a:pPr/>
+              <a:t>02.05.2026</a:t>
+            </a:fld>
+            <a:endParaRPr lang="ru-RU" dirty="0"/>
+          </a:p>
+        </p:txBody>
+      </p:sp>
+      <p:sp>
+        <p:nvSpPr>
+          <p:cNvPr id="4" name="Номер слайда 3">
+            <a:extLst>
+              <a:ext uri="{FF2B5EF4-FFF2-40B4-BE49-F238E27FC236}">
+                <a16:creationId xmlns:a16="http://schemas.microsoft.com/office/drawing/2014/main" id="{5CABC850-9B7A-1F0C-56D3-ECD15AB50002}"/>
+              </a:ext>
+            </a:extLst>
+          </p:cNvPr>
+          <p:cNvSpPr>
+            <a:spLocks noGrp="1"/>
+          </p:cNvSpPr>
+          <p:nvPr>
+            <p:ph type="sldNum" sz="quarter" idx="12"/>
+          </p:nvPr>
+        </p:nvSpPr>
+        <p:spPr/>
+        <p:txBody>
+          <a:bodyPr/>
+          <a:lstStyle/>
+          <a:p>
+            <a:fld id="{7870AAFC-F658-4D4F-B37E-DA3BC9CB41D6}" type="slidenum">
+              <a:rPr lang="ru-RU" smtClean="0"/>
+              <a:pPr/>
+              <a:t>11</a:t>
             </a:fld>
             <a:endParaRPr lang="ru-RU"/>
           </a:p>
@@ -4042,7 +4227,7 @@
           <p:cNvPr id="2" name="Объект 1">
             <a:extLst>
               <a:ext uri="{FF2B5EF4-FFF2-40B4-BE49-F238E27FC236}">
-                <a16:creationId xmlns:a16="http://schemas.microsoft.com/office/drawing/2014/main" id="{9E560912-BE57-EE21-C30B-E359C9446DD8}"/>
+                <a16:creationId xmlns:a16="http://schemas.microsoft.com/office/drawing/2014/main" id="{52878BD1-97FB-6565-D25D-B94F5BD321B9}"/>
               </a:ext>
             </a:extLst>
           </p:cNvPr>
@@ -4055,24 +4240,15 @@
         </p:nvSpPr>
         <p:spPr/>
         <p:txBody>
-          <a:bodyPr/>
-          <a:lstStyle/>
-          <a:p>
-            <a:r>
-              <a:rPr lang="ru-RU" sz="3200" dirty="0"/>
-              <a:t>Создать </a:t>
-            </a:r>
-            <a:r>
-              <a:rPr lang="ru-RU" sz="3200" b="1" dirty="0"/>
-              <a:t>мобильное приложение</a:t>
-            </a:r>
-            <a:r>
-              <a:rPr lang="ru-RU" sz="3200" dirty="0"/>
-              <a:t> для удобного и безопасного управления складскими операциями в реальном времени.</a:t>
-            </a:r>
-          </a:p>
-          <a:p>
-            <a:endParaRPr lang="ru-RU" dirty="0"/>
+          <a:bodyPr>
+            <a:normAutofit/>
+          </a:bodyPr>
+          <a:lstStyle/>
+          <a:p>
+            <a:r>
+              <a:rPr lang="ru-RU" sz="2800" dirty="0"/>
+              <a:t>Складской учёт — критически важная часть логистики и управления запасами в любой компании. Однако во многих небольших организациях до сих пор используются бумажные журналы или Excel-таблицы, что приводит к ошибкам, дублированию данных и потере времени.</a:t>
+            </a:r>
           </a:p>
         </p:txBody>
       </p:sp>
@@ -4081,7 +4257,7 @@
           <p:cNvPr id="3" name="Дата 2">
             <a:extLst>
               <a:ext uri="{FF2B5EF4-FFF2-40B4-BE49-F238E27FC236}">
-                <a16:creationId xmlns:a16="http://schemas.microsoft.com/office/drawing/2014/main" id="{A136C6FB-4B8B-69F3-7F4F-044686EB3531}"/>
+                <a16:creationId xmlns:a16="http://schemas.microsoft.com/office/drawing/2014/main" id="{E28B666B-2EA7-37E0-556C-DDA29656F655}"/>
               </a:ext>
             </a:extLst>
           </p:cNvPr>
@@ -4111,7 +4287,7 @@
           <p:cNvPr id="4" name="Номер слайда 3">
             <a:extLst>
               <a:ext uri="{FF2B5EF4-FFF2-40B4-BE49-F238E27FC236}">
-                <a16:creationId xmlns:a16="http://schemas.microsoft.com/office/drawing/2014/main" id="{3B641B5E-2096-4D25-EC8B-401C0E35131A}"/>
+                <a16:creationId xmlns:a16="http://schemas.microsoft.com/office/drawing/2014/main" id="{C6C32FED-B23C-3D74-348D-B9FEA22CE9D0}"/>
               </a:ext>
             </a:extLst>
           </p:cNvPr>
@@ -4131,6 +4307,166 @@
               <a:rPr lang="ru-RU" smtClean="0"/>
               <a:pPr/>
               <a:t>2</a:t>
+            </a:fld>
+            <a:endParaRPr lang="ru-RU"/>
+          </a:p>
+        </p:txBody>
+      </p:sp>
+      <p:sp>
+        <p:nvSpPr>
+          <p:cNvPr id="5" name="Заголовок 4">
+            <a:extLst>
+              <a:ext uri="{FF2B5EF4-FFF2-40B4-BE49-F238E27FC236}">
+                <a16:creationId xmlns:a16="http://schemas.microsoft.com/office/drawing/2014/main" id="{C44B45E8-0274-2D30-C6CD-71584F0702AF}"/>
+              </a:ext>
+            </a:extLst>
+          </p:cNvPr>
+          <p:cNvSpPr>
+            <a:spLocks noGrp="1"/>
+          </p:cNvSpPr>
+          <p:nvPr>
+            <p:ph type="title"/>
+          </p:nvPr>
+        </p:nvSpPr>
+        <p:spPr/>
+        <p:txBody>
+          <a:bodyPr>
+            <a:normAutofit/>
+          </a:bodyPr>
+          <a:lstStyle/>
+          <a:p>
+            <a:r>
+              <a:rPr lang="ru-RU" sz="4000" b="1" dirty="0"/>
+              <a:t>Актуальность</a:t>
+            </a:r>
+            <a:endParaRPr lang="ru-RU" sz="4000" dirty="0"/>
+          </a:p>
+        </p:txBody>
+      </p:sp>
+    </p:spTree>
+    <p:extLst>
+      <p:ext uri="{BB962C8B-B14F-4D97-AF65-F5344CB8AC3E}">
+        <p14:creationId xmlns:p14="http://schemas.microsoft.com/office/powerpoint/2010/main" val="652261326"/>
+      </p:ext>
+    </p:extLst>
+  </p:cSld>
+  <p:clrMapOvr>
+    <a:masterClrMapping/>
+  </p:clrMapOvr>
+</p:sld>
+</file>
+
+<file path=ppt/slides/slide3.xml><?xml version="1.0" encoding="utf-8"?>
+<p:sld xmlns:a="http://schemas.openxmlformats.org/drawingml/2006/main" xmlns:r="http://schemas.openxmlformats.org/officeDocument/2006/relationships" xmlns:p="http://schemas.openxmlformats.org/presentationml/2006/main">
+  <p:cSld>
+    <p:spTree>
+      <p:nvGrpSpPr>
+        <p:cNvPr id="1" name=""/>
+        <p:cNvGrpSpPr/>
+        <p:nvPr/>
+      </p:nvGrpSpPr>
+      <p:grpSpPr>
+        <a:xfrm>
+          <a:off x="0" y="0"/>
+          <a:ext cx="0" cy="0"/>
+          <a:chOff x="0" y="0"/>
+          <a:chExt cx="0" cy="0"/>
+        </a:xfrm>
+      </p:grpSpPr>
+      <p:sp>
+        <p:nvSpPr>
+          <p:cNvPr id="2" name="Объект 1">
+            <a:extLst>
+              <a:ext uri="{FF2B5EF4-FFF2-40B4-BE49-F238E27FC236}">
+                <a16:creationId xmlns:a16="http://schemas.microsoft.com/office/drawing/2014/main" id="{9E560912-BE57-EE21-C30B-E359C9446DD8}"/>
+              </a:ext>
+            </a:extLst>
+          </p:cNvPr>
+          <p:cNvSpPr>
+            <a:spLocks noGrp="1"/>
+          </p:cNvSpPr>
+          <p:nvPr>
+            <p:ph idx="1"/>
+          </p:nvPr>
+        </p:nvSpPr>
+        <p:spPr/>
+        <p:txBody>
+          <a:bodyPr/>
+          <a:lstStyle/>
+          <a:p>
+            <a:r>
+              <a:rPr lang="ru-RU" sz="3200" dirty="0"/>
+              <a:t>Создать </a:t>
+            </a:r>
+            <a:r>
+              <a:rPr lang="ru-RU" sz="3200" b="1" dirty="0"/>
+              <a:t>мобильное приложение</a:t>
+            </a:r>
+            <a:r>
+              <a:rPr lang="ru-RU" sz="3200" dirty="0"/>
+              <a:t> для удобного и безопасного управления складскими операциями в реальном времени.</a:t>
+            </a:r>
+          </a:p>
+          <a:p>
+            <a:endParaRPr lang="ru-RU" dirty="0"/>
+          </a:p>
+        </p:txBody>
+      </p:sp>
+      <p:sp>
+        <p:nvSpPr>
+          <p:cNvPr id="3" name="Дата 2">
+            <a:extLst>
+              <a:ext uri="{FF2B5EF4-FFF2-40B4-BE49-F238E27FC236}">
+                <a16:creationId xmlns:a16="http://schemas.microsoft.com/office/drawing/2014/main" id="{A136C6FB-4B8B-69F3-7F4F-044686EB3531}"/>
+              </a:ext>
+            </a:extLst>
+          </p:cNvPr>
+          <p:cNvSpPr>
+            <a:spLocks noGrp="1"/>
+          </p:cNvSpPr>
+          <p:nvPr>
+            <p:ph type="dt" sz="half" idx="10"/>
+          </p:nvPr>
+        </p:nvSpPr>
+        <p:spPr/>
+        <p:txBody>
+          <a:bodyPr/>
+          <a:lstStyle/>
+          <a:p>
+            <a:fld id="{112B0F4B-37E6-4319-8F4B-24D1060A079B}" type="datetime1">
+              <a:rPr lang="ru-RU" smtClean="0"/>
+              <a:pPr/>
+              <a:t>02.05.2026</a:t>
+            </a:fld>
+            <a:endParaRPr lang="ru-RU" dirty="0"/>
+          </a:p>
+        </p:txBody>
+      </p:sp>
+      <p:sp>
+        <p:nvSpPr>
+          <p:cNvPr id="4" name="Номер слайда 3">
+            <a:extLst>
+              <a:ext uri="{FF2B5EF4-FFF2-40B4-BE49-F238E27FC236}">
+                <a16:creationId xmlns:a16="http://schemas.microsoft.com/office/drawing/2014/main" id="{3B641B5E-2096-4D25-EC8B-401C0E35131A}"/>
+              </a:ext>
+            </a:extLst>
+          </p:cNvPr>
+          <p:cNvSpPr>
+            <a:spLocks noGrp="1"/>
+          </p:cNvSpPr>
+          <p:nvPr>
+            <p:ph type="sldNum" sz="quarter" idx="12"/>
+          </p:nvPr>
+        </p:nvSpPr>
+        <p:spPr/>
+        <p:txBody>
+          <a:bodyPr/>
+          <a:lstStyle/>
+          <a:p>
+            <a:fld id="{7870AAFC-F658-4D4F-B37E-DA3BC9CB41D6}" type="slidenum">
+              <a:rPr lang="ru-RU" smtClean="0"/>
+              <a:pPr/>
+              <a:t>3</a:t>
             </a:fld>
             <a:endParaRPr lang="ru-RU"/>
           </a:p>
@@ -4639,188 +4975,6 @@
 </p:sld>
 </file>
 
-<file path=ppt/slides/slide3.xml><?xml version="1.0" encoding="utf-8"?>
-<p:sld xmlns:a="http://schemas.openxmlformats.org/drawingml/2006/main" xmlns:r="http://schemas.openxmlformats.org/officeDocument/2006/relationships" xmlns:p="http://schemas.openxmlformats.org/presentationml/2006/main">
-  <p:cSld>
-    <p:spTree>
-      <p:nvGrpSpPr>
-        <p:cNvPr id="1" name=""/>
-        <p:cNvGrpSpPr/>
-        <p:nvPr/>
-      </p:nvGrpSpPr>
-      <p:grpSpPr>
-        <a:xfrm>
-          <a:off x="0" y="0"/>
-          <a:ext cx="0" cy="0"/>
-          <a:chOff x="0" y="0"/>
-          <a:chExt cx="0" cy="0"/>
-        </a:xfrm>
-      </p:grpSpPr>
-      <p:sp>
-        <p:nvSpPr>
-          <p:cNvPr id="2" name="Объект 1">
-            <a:extLst>
-              <a:ext uri="{FF2B5EF4-FFF2-40B4-BE49-F238E27FC236}">
-                <a16:creationId xmlns:a16="http://schemas.microsoft.com/office/drawing/2014/main" id="{33E84B10-E3ED-2D21-CEBC-87494E7F50E6}"/>
-              </a:ext>
-            </a:extLst>
-          </p:cNvPr>
-          <p:cNvSpPr>
-            <a:spLocks noGrp="1"/>
-          </p:cNvSpPr>
-          <p:nvPr>
-            <p:ph idx="1"/>
-          </p:nvPr>
-        </p:nvSpPr>
-        <p:spPr/>
-        <p:txBody>
-          <a:bodyPr>
-            <a:normAutofit/>
-          </a:bodyPr>
-          <a:lstStyle/>
-          <a:p>
-            <a:r>
-              <a:rPr lang="ru-RU" sz="2800" dirty="0"/>
-              <a:t>Реализовать CRUD-операции для товаров, поставок, отгрузок и списаний</a:t>
-            </a:r>
-          </a:p>
-          <a:p>
-            <a:r>
-              <a:rPr lang="ru-RU" sz="2800" dirty="0"/>
-              <a:t>Обеспечить работу с фильтрацией и поиском</a:t>
-            </a:r>
-          </a:p>
-          <a:p>
-            <a:r>
-              <a:rPr lang="ru-RU" sz="2800" dirty="0"/>
-              <a:t>Реализовать интуитивный интерфейс с жестами</a:t>
-            </a:r>
-          </a:p>
-          <a:p>
-            <a:r>
-              <a:rPr lang="ru-RU" sz="2800" dirty="0"/>
-              <a:t>Обеспечить надёжную архитектуру и защиту от ошибок</a:t>
-            </a:r>
-          </a:p>
-          <a:p>
-            <a:r>
-              <a:rPr lang="ru-RU" sz="2800" dirty="0"/>
-              <a:t>Синхронизировать данные с бэкендом (Spring Boot)</a:t>
-            </a:r>
-          </a:p>
-          <a:p>
-            <a:pPr marL="0" indent="0">
-              <a:buNone/>
-            </a:pPr>
-            <a:endParaRPr lang="ru-RU" sz="2800" dirty="0"/>
-          </a:p>
-          <a:p>
-            <a:endParaRPr lang="ru-RU" sz="2800" dirty="0"/>
-          </a:p>
-        </p:txBody>
-      </p:sp>
-      <p:sp>
-        <p:nvSpPr>
-          <p:cNvPr id="3" name="Дата 2">
-            <a:extLst>
-              <a:ext uri="{FF2B5EF4-FFF2-40B4-BE49-F238E27FC236}">
-                <a16:creationId xmlns:a16="http://schemas.microsoft.com/office/drawing/2014/main" id="{8CC99128-210F-B6D4-D77A-410994123C79}"/>
-              </a:ext>
-            </a:extLst>
-          </p:cNvPr>
-          <p:cNvSpPr>
-            <a:spLocks noGrp="1"/>
-          </p:cNvSpPr>
-          <p:nvPr>
-            <p:ph type="dt" sz="half" idx="10"/>
-          </p:nvPr>
-        </p:nvSpPr>
-        <p:spPr/>
-        <p:txBody>
-          <a:bodyPr/>
-          <a:lstStyle/>
-          <a:p>
-            <a:fld id="{112B0F4B-37E6-4319-8F4B-24D1060A079B}" type="datetime1">
-              <a:rPr lang="ru-RU" smtClean="0"/>
-              <a:pPr/>
-              <a:t>02.05.2026</a:t>
-            </a:fld>
-            <a:endParaRPr lang="ru-RU" dirty="0"/>
-          </a:p>
-        </p:txBody>
-      </p:sp>
-      <p:sp>
-        <p:nvSpPr>
-          <p:cNvPr id="4" name="Номер слайда 3">
-            <a:extLst>
-              <a:ext uri="{FF2B5EF4-FFF2-40B4-BE49-F238E27FC236}">
-                <a16:creationId xmlns:a16="http://schemas.microsoft.com/office/drawing/2014/main" id="{FEEDD350-9029-0C65-FB30-88A4F26657D7}"/>
-              </a:ext>
-            </a:extLst>
-          </p:cNvPr>
-          <p:cNvSpPr>
-            <a:spLocks noGrp="1"/>
-          </p:cNvSpPr>
-          <p:nvPr>
-            <p:ph type="sldNum" sz="quarter" idx="12"/>
-          </p:nvPr>
-        </p:nvSpPr>
-        <p:spPr/>
-        <p:txBody>
-          <a:bodyPr/>
-          <a:lstStyle/>
-          <a:p>
-            <a:fld id="{7870AAFC-F658-4D4F-B37E-DA3BC9CB41D6}" type="slidenum">
-              <a:rPr lang="ru-RU" smtClean="0"/>
-              <a:pPr/>
-              <a:t>3</a:t>
-            </a:fld>
-            <a:endParaRPr lang="ru-RU"/>
-          </a:p>
-        </p:txBody>
-      </p:sp>
-      <p:sp>
-        <p:nvSpPr>
-          <p:cNvPr id="5" name="Заголовок 4">
-            <a:extLst>
-              <a:ext uri="{FF2B5EF4-FFF2-40B4-BE49-F238E27FC236}">
-                <a16:creationId xmlns:a16="http://schemas.microsoft.com/office/drawing/2014/main" id="{F12D01B0-FA85-26F0-CC3A-19E78F2E4DE9}"/>
-              </a:ext>
-            </a:extLst>
-          </p:cNvPr>
-          <p:cNvSpPr>
-            <a:spLocks noGrp="1"/>
-          </p:cNvSpPr>
-          <p:nvPr>
-            <p:ph type="title"/>
-          </p:nvPr>
-        </p:nvSpPr>
-        <p:spPr/>
-        <p:txBody>
-          <a:bodyPr/>
-          <a:lstStyle/>
-          <a:p>
-            <a:r>
-              <a:rPr lang="ru-RU" sz="4400" b="1" dirty="0"/>
-              <a:t>Задачи</a:t>
-            </a:r>
-            <a:endParaRPr lang="ru-RU" dirty="0"/>
-          </a:p>
-        </p:txBody>
-      </p:sp>
-    </p:spTree>
-    <p:extLst>
-      <p:ext uri="{BB962C8B-B14F-4D97-AF65-F5344CB8AC3E}">
-        <p14:creationId xmlns:p14="http://schemas.microsoft.com/office/powerpoint/2010/main" val="4057326805"/>
-      </p:ext>
-    </p:extLst>
-  </p:cSld>
-  <p:clrMapOvr>
-    <a:masterClrMapping/>
-  </p:clrMapOvr>
-</p:sld>
-</file>
-
 <file path=ppt/slides/slide4.xml><?xml version="1.0" encoding="utf-8"?>
 <p:sld xmlns:a="http://schemas.openxmlformats.org/drawingml/2006/main" xmlns:r="http://schemas.openxmlformats.org/officeDocument/2006/relationships" xmlns:p="http://schemas.openxmlformats.org/presentationml/2006/main">
   <p:cSld>
@@ -4843,7 +4997,7 @@
           <p:cNvPr id="2" name="Объект 1">
             <a:extLst>
               <a:ext uri="{FF2B5EF4-FFF2-40B4-BE49-F238E27FC236}">
-                <a16:creationId xmlns:a16="http://schemas.microsoft.com/office/drawing/2014/main" id="{C8DC9C1F-7C87-70C2-B731-903D0A37C346}"/>
+                <a16:creationId xmlns:a16="http://schemas.microsoft.com/office/drawing/2014/main" id="{33E84B10-E3ED-2D21-CEBC-87494E7F50E6}"/>
               </a:ext>
             </a:extLst>
           </p:cNvPr>
@@ -4862,73 +5016,42 @@
           <a:lstStyle/>
           <a:p>
             <a:r>
-              <a:rPr lang="ru-RU" sz="2400" dirty="0"/>
-              <a:t>Проект разделён на модули (</a:t>
-            </a:r>
-            <a:r>
-              <a:rPr lang="ru-RU" sz="2400" dirty="0" err="1"/>
-              <a:t>data</a:t>
-            </a:r>
-            <a:r>
-              <a:rPr lang="ru-RU" sz="2400" dirty="0"/>
-              <a:t>, </a:t>
-            </a:r>
-            <a:r>
-              <a:rPr lang="ru-RU" sz="2400" dirty="0" err="1"/>
-              <a:t>domain</a:t>
-            </a:r>
-            <a:r>
-              <a:rPr lang="ru-RU" sz="2400" dirty="0"/>
-              <a:t>, </a:t>
-            </a:r>
-            <a:r>
-              <a:rPr lang="ru-RU" sz="2400" dirty="0" err="1"/>
-              <a:t>view</a:t>
-            </a:r>
-            <a:r>
-              <a:rPr lang="ru-RU" sz="2400" dirty="0"/>
-              <a:t>), что соответствует принципу </a:t>
-            </a:r>
-            <a:r>
-              <a:rPr lang="ru-RU" sz="2400" b="1" dirty="0"/>
-              <a:t>слоистой архитектуры.</a:t>
-            </a:r>
-          </a:p>
-          <a:p>
-            <a:endParaRPr lang="ru-RU" sz="2400" b="1" dirty="0"/>
-          </a:p>
-          <a:p>
-            <a:r>
-              <a:rPr lang="ru-RU" sz="2400" b="1" dirty="0"/>
-              <a:t> Имеет ряд преимуществ:</a:t>
-            </a:r>
-          </a:p>
-          <a:p>
-            <a:r>
-              <a:rPr lang="ru-RU" sz="2400" dirty="0"/>
-              <a:t>Тестируемость</a:t>
-            </a:r>
-          </a:p>
-          <a:p>
-            <a:r>
-              <a:rPr lang="ru-RU" sz="2400" dirty="0"/>
-              <a:t>Разделение ответственности</a:t>
-            </a:r>
-          </a:p>
-          <a:p>
-            <a:r>
-              <a:rPr lang="ru-RU" sz="2400" dirty="0"/>
-              <a:t>Лёгкая замена сетевого слоя</a:t>
-            </a:r>
-          </a:p>
-          <a:p>
-            <a:r>
-              <a:rPr lang="ru-RU" sz="2400" dirty="0"/>
-              <a:t>Устойчивость к изменениям</a:t>
-            </a:r>
-          </a:p>
-          <a:p>
-            <a:endParaRPr lang="ru-RU" sz="2400" dirty="0"/>
+              <a:rPr lang="ru-RU" sz="2800" dirty="0"/>
+              <a:t>Реализовать CRUD-операции для товаров, поставок, отгрузок и списаний</a:t>
+            </a:r>
+          </a:p>
+          <a:p>
+            <a:r>
+              <a:rPr lang="ru-RU" sz="2800" dirty="0"/>
+              <a:t>Обеспечить работу с фильтрацией и поиском</a:t>
+            </a:r>
+          </a:p>
+          <a:p>
+            <a:r>
+              <a:rPr lang="ru-RU" sz="2800" dirty="0"/>
+              <a:t>Реализовать интуитивный интерфейс с жестами</a:t>
+            </a:r>
+          </a:p>
+          <a:p>
+            <a:r>
+              <a:rPr lang="ru-RU" sz="2800" dirty="0"/>
+              <a:t>Обеспечить надёжную архитектуру и защиту от ошибок</a:t>
+            </a:r>
+          </a:p>
+          <a:p>
+            <a:r>
+              <a:rPr lang="ru-RU" sz="2800" dirty="0"/>
+              <a:t>Синхронизировать данные с бэкендом (Spring Boot)</a:t>
+            </a:r>
+          </a:p>
+          <a:p>
+            <a:pPr marL="0" indent="0">
+              <a:buNone/>
+            </a:pPr>
+            <a:endParaRPr lang="ru-RU" sz="2800" dirty="0"/>
+          </a:p>
+          <a:p>
+            <a:endParaRPr lang="ru-RU" sz="2800" dirty="0"/>
           </a:p>
         </p:txBody>
       </p:sp>
@@ -4937,7 +5060,7 @@
           <p:cNvPr id="3" name="Дата 2">
             <a:extLst>
               <a:ext uri="{FF2B5EF4-FFF2-40B4-BE49-F238E27FC236}">
-                <a16:creationId xmlns:a16="http://schemas.microsoft.com/office/drawing/2014/main" id="{E6710B02-FF30-6739-0033-AFAA27418916}"/>
+                <a16:creationId xmlns:a16="http://schemas.microsoft.com/office/drawing/2014/main" id="{8CC99128-210F-B6D4-D77A-410994123C79}"/>
               </a:ext>
             </a:extLst>
           </p:cNvPr>
@@ -4967,7 +5090,7 @@
           <p:cNvPr id="4" name="Номер слайда 3">
             <a:extLst>
               <a:ext uri="{FF2B5EF4-FFF2-40B4-BE49-F238E27FC236}">
-                <a16:creationId xmlns:a16="http://schemas.microsoft.com/office/drawing/2014/main" id="{ABBA8696-67BF-321B-15E2-BFDE4DF712E6}"/>
+                <a16:creationId xmlns:a16="http://schemas.microsoft.com/office/drawing/2014/main" id="{FEEDD350-9029-0C65-FB30-88A4F26657D7}"/>
               </a:ext>
             </a:extLst>
           </p:cNvPr>
@@ -4987,6 +5110,219 @@
               <a:rPr lang="ru-RU" smtClean="0"/>
               <a:pPr/>
               <a:t>4</a:t>
+            </a:fld>
+            <a:endParaRPr lang="ru-RU"/>
+          </a:p>
+        </p:txBody>
+      </p:sp>
+      <p:sp>
+        <p:nvSpPr>
+          <p:cNvPr id="5" name="Заголовок 4">
+            <a:extLst>
+              <a:ext uri="{FF2B5EF4-FFF2-40B4-BE49-F238E27FC236}">
+                <a16:creationId xmlns:a16="http://schemas.microsoft.com/office/drawing/2014/main" id="{F12D01B0-FA85-26F0-CC3A-19E78F2E4DE9}"/>
+              </a:ext>
+            </a:extLst>
+          </p:cNvPr>
+          <p:cNvSpPr>
+            <a:spLocks noGrp="1"/>
+          </p:cNvSpPr>
+          <p:nvPr>
+            <p:ph type="title"/>
+          </p:nvPr>
+        </p:nvSpPr>
+        <p:spPr/>
+        <p:txBody>
+          <a:bodyPr/>
+          <a:lstStyle/>
+          <a:p>
+            <a:r>
+              <a:rPr lang="ru-RU" sz="4400" b="1" dirty="0"/>
+              <a:t>Задачи</a:t>
+            </a:r>
+            <a:endParaRPr lang="ru-RU" dirty="0"/>
+          </a:p>
+        </p:txBody>
+      </p:sp>
+    </p:spTree>
+    <p:extLst>
+      <p:ext uri="{BB962C8B-B14F-4D97-AF65-F5344CB8AC3E}">
+        <p14:creationId xmlns:p14="http://schemas.microsoft.com/office/powerpoint/2010/main" val="4057326805"/>
+      </p:ext>
+    </p:extLst>
+  </p:cSld>
+  <p:clrMapOvr>
+    <a:masterClrMapping/>
+  </p:clrMapOvr>
+</p:sld>
+</file>
+
+<file path=ppt/slides/slide5.xml><?xml version="1.0" encoding="utf-8"?>
+<p:sld xmlns:a="http://schemas.openxmlformats.org/drawingml/2006/main" xmlns:r="http://schemas.openxmlformats.org/officeDocument/2006/relationships" xmlns:p="http://schemas.openxmlformats.org/presentationml/2006/main">
+  <p:cSld>
+    <p:spTree>
+      <p:nvGrpSpPr>
+        <p:cNvPr id="1" name=""/>
+        <p:cNvGrpSpPr/>
+        <p:nvPr/>
+      </p:nvGrpSpPr>
+      <p:grpSpPr>
+        <a:xfrm>
+          <a:off x="0" y="0"/>
+          <a:ext cx="0" cy="0"/>
+          <a:chOff x="0" y="0"/>
+          <a:chExt cx="0" cy="0"/>
+        </a:xfrm>
+      </p:grpSpPr>
+      <p:sp>
+        <p:nvSpPr>
+          <p:cNvPr id="2" name="Объект 1">
+            <a:extLst>
+              <a:ext uri="{FF2B5EF4-FFF2-40B4-BE49-F238E27FC236}">
+                <a16:creationId xmlns:a16="http://schemas.microsoft.com/office/drawing/2014/main" id="{C8DC9C1F-7C87-70C2-B731-903D0A37C346}"/>
+              </a:ext>
+            </a:extLst>
+          </p:cNvPr>
+          <p:cNvSpPr>
+            <a:spLocks noGrp="1"/>
+          </p:cNvSpPr>
+          <p:nvPr>
+            <p:ph idx="1"/>
+          </p:nvPr>
+        </p:nvSpPr>
+        <p:spPr/>
+        <p:txBody>
+          <a:bodyPr>
+            <a:normAutofit/>
+          </a:bodyPr>
+          <a:lstStyle/>
+          <a:p>
+            <a:r>
+              <a:rPr lang="ru-RU" sz="2400" dirty="0"/>
+              <a:t>Проект разделён на модули (</a:t>
+            </a:r>
+            <a:r>
+              <a:rPr lang="ru-RU" sz="2400" dirty="0" err="1"/>
+              <a:t>data</a:t>
+            </a:r>
+            <a:r>
+              <a:rPr lang="ru-RU" sz="2400" dirty="0"/>
+              <a:t>, </a:t>
+            </a:r>
+            <a:r>
+              <a:rPr lang="ru-RU" sz="2400" dirty="0" err="1"/>
+              <a:t>domain</a:t>
+            </a:r>
+            <a:r>
+              <a:rPr lang="ru-RU" sz="2400" dirty="0"/>
+              <a:t>, </a:t>
+            </a:r>
+            <a:r>
+              <a:rPr lang="ru-RU" sz="2400" dirty="0" err="1"/>
+              <a:t>view</a:t>
+            </a:r>
+            <a:r>
+              <a:rPr lang="ru-RU" sz="2400" dirty="0"/>
+              <a:t>), что соответствует принципу </a:t>
+            </a:r>
+            <a:r>
+              <a:rPr lang="ru-RU" sz="2400" b="1" dirty="0"/>
+              <a:t>слоистой архитектуры.</a:t>
+            </a:r>
+          </a:p>
+          <a:p>
+            <a:endParaRPr lang="ru-RU" sz="2400" b="1" dirty="0"/>
+          </a:p>
+          <a:p>
+            <a:r>
+              <a:rPr lang="ru-RU" sz="2400" b="1" dirty="0"/>
+              <a:t> Имеет ряд преимуществ:</a:t>
+            </a:r>
+          </a:p>
+          <a:p>
+            <a:r>
+              <a:rPr lang="ru-RU" sz="2400" dirty="0"/>
+              <a:t>Тестируемость</a:t>
+            </a:r>
+          </a:p>
+          <a:p>
+            <a:r>
+              <a:rPr lang="ru-RU" sz="2400" dirty="0"/>
+              <a:t>Разделение ответственности</a:t>
+            </a:r>
+          </a:p>
+          <a:p>
+            <a:r>
+              <a:rPr lang="ru-RU" sz="2400" dirty="0"/>
+              <a:t>Лёгкая замена сетевого слоя</a:t>
+            </a:r>
+          </a:p>
+          <a:p>
+            <a:r>
+              <a:rPr lang="ru-RU" sz="2400" dirty="0"/>
+              <a:t>Устойчивость к изменениям</a:t>
+            </a:r>
+          </a:p>
+          <a:p>
+            <a:endParaRPr lang="ru-RU" sz="2400" dirty="0"/>
+          </a:p>
+        </p:txBody>
+      </p:sp>
+      <p:sp>
+        <p:nvSpPr>
+          <p:cNvPr id="3" name="Дата 2">
+            <a:extLst>
+              <a:ext uri="{FF2B5EF4-FFF2-40B4-BE49-F238E27FC236}">
+                <a16:creationId xmlns:a16="http://schemas.microsoft.com/office/drawing/2014/main" id="{E6710B02-FF30-6739-0033-AFAA27418916}"/>
+              </a:ext>
+            </a:extLst>
+          </p:cNvPr>
+          <p:cNvSpPr>
+            <a:spLocks noGrp="1"/>
+          </p:cNvSpPr>
+          <p:nvPr>
+            <p:ph type="dt" sz="half" idx="10"/>
+          </p:nvPr>
+        </p:nvSpPr>
+        <p:spPr/>
+        <p:txBody>
+          <a:bodyPr/>
+          <a:lstStyle/>
+          <a:p>
+            <a:fld id="{112B0F4B-37E6-4319-8F4B-24D1060A079B}" type="datetime1">
+              <a:rPr lang="ru-RU" smtClean="0"/>
+              <a:pPr/>
+              <a:t>02.05.2026</a:t>
+            </a:fld>
+            <a:endParaRPr lang="ru-RU" dirty="0"/>
+          </a:p>
+        </p:txBody>
+      </p:sp>
+      <p:sp>
+        <p:nvSpPr>
+          <p:cNvPr id="4" name="Номер слайда 3">
+            <a:extLst>
+              <a:ext uri="{FF2B5EF4-FFF2-40B4-BE49-F238E27FC236}">
+                <a16:creationId xmlns:a16="http://schemas.microsoft.com/office/drawing/2014/main" id="{ABBA8696-67BF-321B-15E2-BFDE4DF712E6}"/>
+              </a:ext>
+            </a:extLst>
+          </p:cNvPr>
+          <p:cNvSpPr>
+            <a:spLocks noGrp="1"/>
+          </p:cNvSpPr>
+          <p:nvPr>
+            <p:ph type="sldNum" sz="quarter" idx="12"/>
+          </p:nvPr>
+        </p:nvSpPr>
+        <p:spPr/>
+        <p:txBody>
+          <a:bodyPr/>
+          <a:lstStyle/>
+          <a:p>
+            <a:fld id="{7870AAFC-F658-4D4F-B37E-DA3BC9CB41D6}" type="slidenum">
+              <a:rPr lang="ru-RU" smtClean="0"/>
+              <a:pPr/>
+              <a:t>5</a:t>
             </a:fld>
             <a:endParaRPr lang="ru-RU"/>
           </a:p>
@@ -5122,7 +5458,7 @@
 </p:sld>
 </file>
 
-<file path=ppt/slides/slide5.xml><?xml version="1.0" encoding="utf-8"?>
+<file path=ppt/slides/slide6.xml><?xml version="1.0" encoding="utf-8"?>
 <p:sld xmlns:a="http://schemas.openxmlformats.org/drawingml/2006/main" xmlns:r="http://schemas.openxmlformats.org/officeDocument/2006/relationships" xmlns:p="http://schemas.openxmlformats.org/presentationml/2006/main">
   <p:cSld>
     <p:spTree>
@@ -5351,7 +5687,7 @@
             <a:fld id="{7870AAFC-F658-4D4F-B37E-DA3BC9CB41D6}" type="slidenum">
               <a:rPr lang="ru-RU" smtClean="0"/>
               <a:pPr/>
-              <a:t>5</a:t>
+              <a:t>6</a:t>
             </a:fld>
             <a:endParaRPr lang="ru-RU"/>
           </a:p>
@@ -5449,7 +5785,7 @@
 </p:sld>
 </file>
 
-<file path=ppt/slides/slide6.xml><?xml version="1.0" encoding="utf-8"?>
+<file path=ppt/slides/slide7.xml><?xml version="1.0" encoding="utf-8"?>
 <p:sld xmlns:a="http://schemas.openxmlformats.org/drawingml/2006/main" xmlns:r="http://schemas.openxmlformats.org/officeDocument/2006/relationships" xmlns:p="http://schemas.openxmlformats.org/presentationml/2006/main">
   <p:cSld>
     <p:spTree>
@@ -5588,7 +5924,7 @@
             <a:fld id="{7870AAFC-F658-4D4F-B37E-DA3BC9CB41D6}" type="slidenum">
               <a:rPr lang="ru-RU" smtClean="0"/>
               <a:pPr/>
-              <a:t>6</a:t>
+              <a:t>7</a:t>
             </a:fld>
             <a:endParaRPr lang="ru-RU"/>
           </a:p>
@@ -5743,166 +6079,6 @@
 </p:sld>
 </file>
 
-<file path=ppt/slides/slide7.xml><?xml version="1.0" encoding="utf-8"?>
-<p:sld xmlns:a="http://schemas.openxmlformats.org/drawingml/2006/main" xmlns:r="http://schemas.openxmlformats.org/officeDocument/2006/relationships" xmlns:p="http://schemas.openxmlformats.org/presentationml/2006/main">
-  <p:cSld>
-    <p:spTree>
-      <p:nvGrpSpPr>
-        <p:cNvPr id="1" name=""/>
-        <p:cNvGrpSpPr/>
-        <p:nvPr/>
-      </p:nvGrpSpPr>
-      <p:grpSpPr>
-        <a:xfrm>
-          <a:off x="0" y="0"/>
-          <a:ext cx="0" cy="0"/>
-          <a:chOff x="0" y="0"/>
-          <a:chExt cx="0" cy="0"/>
-        </a:xfrm>
-      </p:grpSpPr>
-      <p:sp>
-        <p:nvSpPr>
-          <p:cNvPr id="3" name="Дата 2">
-            <a:extLst>
-              <a:ext uri="{FF2B5EF4-FFF2-40B4-BE49-F238E27FC236}">
-                <a16:creationId xmlns:a16="http://schemas.microsoft.com/office/drawing/2014/main" id="{454880B4-601E-21CD-7318-F314DE32BA0D}"/>
-              </a:ext>
-            </a:extLst>
-          </p:cNvPr>
-          <p:cNvSpPr>
-            <a:spLocks noGrp="1"/>
-          </p:cNvSpPr>
-          <p:nvPr>
-            <p:ph type="dt" sz="half" idx="10"/>
-          </p:nvPr>
-        </p:nvSpPr>
-        <p:spPr/>
-        <p:txBody>
-          <a:bodyPr/>
-          <a:lstStyle/>
-          <a:p>
-            <a:fld id="{112B0F4B-37E6-4319-8F4B-24D1060A079B}" type="datetime1">
-              <a:rPr lang="ru-RU" smtClean="0"/>
-              <a:pPr/>
-              <a:t>02.05.2026</a:t>
-            </a:fld>
-            <a:endParaRPr lang="ru-RU" dirty="0"/>
-          </a:p>
-        </p:txBody>
-      </p:sp>
-      <p:sp>
-        <p:nvSpPr>
-          <p:cNvPr id="4" name="Номер слайда 3">
-            <a:extLst>
-              <a:ext uri="{FF2B5EF4-FFF2-40B4-BE49-F238E27FC236}">
-                <a16:creationId xmlns:a16="http://schemas.microsoft.com/office/drawing/2014/main" id="{D0273C07-5BC8-EB77-E88A-459E3CAB3029}"/>
-              </a:ext>
-            </a:extLst>
-          </p:cNvPr>
-          <p:cNvSpPr>
-            <a:spLocks noGrp="1"/>
-          </p:cNvSpPr>
-          <p:nvPr>
-            <p:ph type="sldNum" sz="quarter" idx="12"/>
-          </p:nvPr>
-        </p:nvSpPr>
-        <p:spPr/>
-        <p:txBody>
-          <a:bodyPr/>
-          <a:lstStyle/>
-          <a:p>
-            <a:fld id="{7870AAFC-F658-4D4F-B37E-DA3BC9CB41D6}" type="slidenum">
-              <a:rPr lang="ru-RU" smtClean="0"/>
-              <a:pPr/>
-              <a:t>7</a:t>
-            </a:fld>
-            <a:endParaRPr lang="ru-RU"/>
-          </a:p>
-        </p:txBody>
-      </p:sp>
-      <p:sp>
-        <p:nvSpPr>
-          <p:cNvPr id="5" name="Заголовок 4">
-            <a:extLst>
-              <a:ext uri="{FF2B5EF4-FFF2-40B4-BE49-F238E27FC236}">
-                <a16:creationId xmlns:a16="http://schemas.microsoft.com/office/drawing/2014/main" id="{91CADCDF-4158-8415-866F-0656741EDD32}"/>
-              </a:ext>
-            </a:extLst>
-          </p:cNvPr>
-          <p:cNvSpPr>
-            <a:spLocks noGrp="1"/>
-          </p:cNvSpPr>
-          <p:nvPr>
-            <p:ph type="title"/>
-          </p:nvPr>
-        </p:nvSpPr>
-        <p:spPr/>
-        <p:txBody>
-          <a:bodyPr>
-            <a:normAutofit/>
-          </a:bodyPr>
-          <a:lstStyle/>
-          <a:p>
-            <a:r>
-              <a:rPr lang="en-US" sz="4000" b="1" dirty="0"/>
-              <a:t>Use-case </a:t>
-            </a:r>
-            <a:r>
-              <a:rPr lang="ru-RU" sz="4000" b="1" dirty="0"/>
-              <a:t>диаграмма</a:t>
-            </a:r>
-            <a:endParaRPr lang="ru-RU" sz="4000" dirty="0"/>
-          </a:p>
-        </p:txBody>
-      </p:sp>
-      <p:pic>
-        <p:nvPicPr>
-          <p:cNvPr id="7" name="Объект 4">
-            <a:extLst>
-              <a:ext uri="{FF2B5EF4-FFF2-40B4-BE49-F238E27FC236}">
-                <a16:creationId xmlns:a16="http://schemas.microsoft.com/office/drawing/2014/main" id="{0F0A0CF3-8683-9CCC-C32C-9C85A4F7DF33}"/>
-              </a:ext>
-            </a:extLst>
-          </p:cNvPr>
-          <p:cNvPicPr>
-            <a:picLocks noGrp="1" noChangeAspect="1"/>
-          </p:cNvPicPr>
-          <p:nvPr>
-            <p:ph idx="1"/>
-          </p:nvPr>
-        </p:nvPicPr>
-        <p:blipFill>
-          <a:blip r:embed="rId2">
-            <a:extLst>
-              <a:ext uri="{28A0092B-C50C-407E-A947-70E740481C1C}">
-                <a14:useLocalDpi xmlns:a14="http://schemas.microsoft.com/office/drawing/2010/main" val="0"/>
-              </a:ext>
-            </a:extLst>
-          </a:blip>
-          <a:stretch>
-            <a:fillRect/>
-          </a:stretch>
-        </p:blipFill>
-        <p:spPr>
-          <a:xfrm>
-            <a:off x="2980507" y="1062842"/>
-            <a:ext cx="6060168" cy="4979769"/>
-          </a:xfrm>
-        </p:spPr>
-      </p:pic>
-    </p:spTree>
-    <p:extLst>
-      <p:ext uri="{BB962C8B-B14F-4D97-AF65-F5344CB8AC3E}">
-        <p14:creationId xmlns:p14="http://schemas.microsoft.com/office/powerpoint/2010/main" val="1122021486"/>
-      </p:ext>
-    </p:extLst>
-  </p:cSld>
-  <p:clrMapOvr>
-    <a:masterClrMapping/>
-  </p:clrMapOvr>
-</p:sld>
-</file>
-
 <file path=ppt/slides/slide8.xml><?xml version="1.0" encoding="utf-8"?>
 <p:sld xmlns:a="http://schemas.openxmlformats.org/drawingml/2006/main" xmlns:r="http://schemas.openxmlformats.org/officeDocument/2006/relationships" xmlns:p="http://schemas.openxmlformats.org/presentationml/2006/main">
   <p:cSld>
@@ -5922,53 +6098,10 @@
       </p:grpSpPr>
       <p:sp>
         <p:nvSpPr>
-          <p:cNvPr id="2" name="Объект 1">
-            <a:extLst>
-              <a:ext uri="{FF2B5EF4-FFF2-40B4-BE49-F238E27FC236}">
-                <a16:creationId xmlns:a16="http://schemas.microsoft.com/office/drawing/2014/main" id="{D20BD85A-9BDE-CC72-91E2-82DB2850F21B}"/>
-              </a:ext>
-            </a:extLst>
-          </p:cNvPr>
-          <p:cNvSpPr>
-            <a:spLocks noGrp="1"/>
-          </p:cNvSpPr>
-          <p:nvPr>
-            <p:ph idx="1"/>
-          </p:nvPr>
-        </p:nvSpPr>
-        <p:spPr/>
-        <p:txBody>
-          <a:bodyPr/>
-          <a:lstStyle/>
-          <a:p>
-            <a:r>
-              <a:rPr lang="en-US" sz="2800" dirty="0"/>
-              <a:t>Activity → </a:t>
-            </a:r>
-            <a:r>
-              <a:rPr lang="en-US" sz="2800" dirty="0" err="1"/>
-              <a:t>ViewModel</a:t>
-            </a:r>
-            <a:r>
-              <a:rPr lang="en-US" sz="2800" dirty="0"/>
-              <a:t> → Repository → Retrofit → API → </a:t>
-            </a:r>
-            <a:r>
-              <a:rPr lang="ru-RU" sz="2800" dirty="0"/>
-              <a:t>обратно</a:t>
-            </a:r>
-          </a:p>
-          <a:p>
-            <a:endParaRPr lang="ru-RU" dirty="0"/>
-          </a:p>
-        </p:txBody>
-      </p:sp>
-      <p:sp>
-        <p:nvSpPr>
           <p:cNvPr id="3" name="Дата 2">
             <a:extLst>
               <a:ext uri="{FF2B5EF4-FFF2-40B4-BE49-F238E27FC236}">
-                <a16:creationId xmlns:a16="http://schemas.microsoft.com/office/drawing/2014/main" id="{6A823441-A281-AACF-E2E0-72136D22B910}"/>
+                <a16:creationId xmlns:a16="http://schemas.microsoft.com/office/drawing/2014/main" id="{454880B4-601E-21CD-7318-F314DE32BA0D}"/>
               </a:ext>
             </a:extLst>
           </p:cNvPr>
@@ -5998,7 +6131,7 @@
           <p:cNvPr id="4" name="Номер слайда 3">
             <a:extLst>
               <a:ext uri="{FF2B5EF4-FFF2-40B4-BE49-F238E27FC236}">
-                <a16:creationId xmlns:a16="http://schemas.microsoft.com/office/drawing/2014/main" id="{8AFBF1BC-E958-D205-CE49-87C5A3B3CE8A}"/>
+                <a16:creationId xmlns:a16="http://schemas.microsoft.com/office/drawing/2014/main" id="{D0273C07-5BC8-EB77-E88A-459E3CAB3029}"/>
               </a:ext>
             </a:extLst>
           </p:cNvPr>
@@ -6028,7 +6161,7 @@
           <p:cNvPr id="5" name="Заголовок 4">
             <a:extLst>
               <a:ext uri="{FF2B5EF4-FFF2-40B4-BE49-F238E27FC236}">
-                <a16:creationId xmlns:a16="http://schemas.microsoft.com/office/drawing/2014/main" id="{9B205849-6C22-DCAA-2B2C-40534D753081}"/>
+                <a16:creationId xmlns:a16="http://schemas.microsoft.com/office/drawing/2014/main" id="{91CADCDF-4158-8415-866F-0656741EDD32}"/>
               </a:ext>
             </a:extLst>
           </p:cNvPr>
@@ -6042,59 +6175,61 @@
         <p:spPr/>
         <p:txBody>
           <a:bodyPr>
-            <a:noAutofit/>
+            <a:normAutofit/>
           </a:bodyPr>
           <a:lstStyle/>
           <a:p>
             <a:r>
-              <a:rPr lang="ru-RU" sz="3600" b="1" dirty="0"/>
-              <a:t>Диаграмма последовательности </a:t>
-            </a:r>
-            <a:br>
-              <a:rPr lang="ru-RU" sz="3600" b="1" dirty="0"/>
-            </a:br>
-            <a:r>
-              <a:rPr lang="ru-RU" sz="3600" b="1" dirty="0"/>
-              <a:t>— Загрузка списка</a:t>
-            </a:r>
-            <a:endParaRPr lang="ru-RU" sz="3600" dirty="0"/>
+              <a:rPr lang="en-US" sz="4000" b="1" dirty="0"/>
+              <a:t>Use-case </a:t>
+            </a:r>
+            <a:r>
+              <a:rPr lang="ru-RU" sz="4000" b="1" dirty="0"/>
+              <a:t>диаграмма</a:t>
+            </a:r>
+            <a:endParaRPr lang="ru-RU" sz="4000" dirty="0"/>
           </a:p>
         </p:txBody>
       </p:sp>
       <p:pic>
         <p:nvPicPr>
-          <p:cNvPr id="6" name="Рисунок 5">
-            <a:extLst>
-              <a:ext uri="{FF2B5EF4-FFF2-40B4-BE49-F238E27FC236}">
-                <a16:creationId xmlns:a16="http://schemas.microsoft.com/office/drawing/2014/main" id="{AAB7853F-70E0-F6F2-CD21-F736B11DD546}"/>
+          <p:cNvPr id="7" name="Объект 4">
+            <a:extLst>
+              <a:ext uri="{FF2B5EF4-FFF2-40B4-BE49-F238E27FC236}">
+                <a16:creationId xmlns:a16="http://schemas.microsoft.com/office/drawing/2014/main" id="{0F0A0CF3-8683-9CCC-C32C-9C85A4F7DF33}"/>
               </a:ext>
             </a:extLst>
           </p:cNvPr>
           <p:cNvPicPr>
-            <a:picLocks noChangeAspect="1"/>
+            <a:picLocks noGrp="1" noChangeAspect="1"/>
           </p:cNvPicPr>
-          <p:nvPr/>
+          <p:nvPr>
+            <p:ph idx="1"/>
+          </p:nvPr>
         </p:nvPicPr>
         <p:blipFill>
-          <a:blip r:embed="rId2"/>
+          <a:blip r:embed="rId2">
+            <a:extLst>
+              <a:ext uri="{28A0092B-C50C-407E-A947-70E740481C1C}">
+                <a14:useLocalDpi xmlns:a14="http://schemas.microsoft.com/office/drawing/2010/main" val="0"/>
+              </a:ext>
+            </a:extLst>
+          </a:blip>
           <a:stretch>
             <a:fillRect/>
           </a:stretch>
         </p:blipFill>
         <p:spPr>
           <a:xfrm>
-            <a:off x="838200" y="1930640"/>
-            <a:ext cx="10390898" cy="3860560"/>
+            <a:off x="2980507" y="1062842"/>
+            <a:ext cx="6060168" cy="4979769"/>
           </a:xfrm>
-          <a:prstGeom prst="rect">
-            <a:avLst/>
-          </a:prstGeom>
         </p:spPr>
       </p:pic>
     </p:spTree>
     <p:extLst>
       <p:ext uri="{BB962C8B-B14F-4D97-AF65-F5344CB8AC3E}">
-        <p14:creationId xmlns:p14="http://schemas.microsoft.com/office/powerpoint/2010/main" val="2214250286"/>
+        <p14:creationId xmlns:p14="http://schemas.microsoft.com/office/powerpoint/2010/main" val="1122021486"/>
       </p:ext>
     </p:extLst>
   </p:cSld>
@@ -6126,7 +6261,7 @@
           <p:cNvPr id="2" name="Объект 1">
             <a:extLst>
               <a:ext uri="{FF2B5EF4-FFF2-40B4-BE49-F238E27FC236}">
-                <a16:creationId xmlns:a16="http://schemas.microsoft.com/office/drawing/2014/main" id="{16DBBE4C-D221-26FF-C469-20DBD08D6805}"/>
+                <a16:creationId xmlns:a16="http://schemas.microsoft.com/office/drawing/2014/main" id="{D20BD85A-9BDE-CC72-91E2-82DB2850F21B}"/>
               </a:ext>
             </a:extLst>
           </p:cNvPr>
@@ -6139,48 +6274,28 @@
         </p:nvSpPr>
         <p:spPr/>
         <p:txBody>
-          <a:bodyPr>
-            <a:normAutofit/>
-          </a:bodyPr>
-          <a:lstStyle/>
-          <a:p>
+          <a:bodyPr/>
+          <a:lstStyle/>
+          <a:p>
+            <a:r>
+              <a:rPr lang="en-US" sz="2800" dirty="0"/>
+              <a:t>Activity → </a:t>
+            </a:r>
+            <a:r>
+              <a:rPr lang="en-US" sz="2800" dirty="0" err="1"/>
+              <a:t>ViewModel</a:t>
+            </a:r>
+            <a:r>
+              <a:rPr lang="en-US" sz="2800" dirty="0"/>
+              <a:t> → Repository → Retrofit → API → </a:t>
+            </a:r>
             <a:r>
               <a:rPr lang="ru-RU" sz="2800" dirty="0"/>
-              <a:t>Пользователь видит понятные сообщения об ошибках</a:t>
-            </a:r>
-          </a:p>
-          <a:p>
-            <a:r>
-              <a:rPr lang="ru-RU" sz="2800" dirty="0"/>
-              <a:t>Проверка обязательных полей</a:t>
-            </a:r>
-          </a:p>
-          <a:p>
-            <a:r>
-              <a:rPr lang="ru-RU" sz="2800" dirty="0"/>
-              <a:t>Ограничения количества по остатку</a:t>
-            </a:r>
-          </a:p>
-          <a:p>
-            <a:r>
-              <a:rPr lang="ru-RU" sz="2800" dirty="0"/>
-              <a:t>Нет прямого доступа к данным из UI</a:t>
-            </a:r>
-          </a:p>
-          <a:p>
-            <a:r>
-              <a:rPr lang="ru-RU" sz="2800" dirty="0"/>
-              <a:t>Все операции проходят через контролируемые слои</a:t>
-            </a:r>
-          </a:p>
-          <a:p>
-            <a:pPr marL="0" indent="0">
-              <a:buNone/>
-            </a:pPr>
-            <a:endParaRPr lang="ru-RU" sz="2800" dirty="0"/>
-          </a:p>
-          <a:p>
-            <a:endParaRPr lang="ru-RU" sz="2800" dirty="0"/>
+              <a:t>обратно</a:t>
+            </a:r>
+          </a:p>
+          <a:p>
+            <a:endParaRPr lang="ru-RU" dirty="0"/>
           </a:p>
         </p:txBody>
       </p:sp>
@@ -6189,7 +6304,7 @@
           <p:cNvPr id="3" name="Дата 2">
             <a:extLst>
               <a:ext uri="{FF2B5EF4-FFF2-40B4-BE49-F238E27FC236}">
-                <a16:creationId xmlns:a16="http://schemas.microsoft.com/office/drawing/2014/main" id="{62CBC481-080D-9F65-31A2-32EB39836771}"/>
+                <a16:creationId xmlns:a16="http://schemas.microsoft.com/office/drawing/2014/main" id="{6A823441-A281-AACF-E2E0-72136D22B910}"/>
               </a:ext>
             </a:extLst>
           </p:cNvPr>
@@ -6219,7 +6334,7 @@
           <p:cNvPr id="4" name="Номер слайда 3">
             <a:extLst>
               <a:ext uri="{FF2B5EF4-FFF2-40B4-BE49-F238E27FC236}">
-                <a16:creationId xmlns:a16="http://schemas.microsoft.com/office/drawing/2014/main" id="{EA83E5AC-19E2-1531-28DB-8D7273F74430}"/>
+                <a16:creationId xmlns:a16="http://schemas.microsoft.com/office/drawing/2014/main" id="{8AFBF1BC-E958-D205-CE49-87C5A3B3CE8A}"/>
               </a:ext>
             </a:extLst>
           </p:cNvPr>
@@ -6249,7 +6364,7 @@
           <p:cNvPr id="5" name="Заголовок 4">
             <a:extLst>
               <a:ext uri="{FF2B5EF4-FFF2-40B4-BE49-F238E27FC236}">
-                <a16:creationId xmlns:a16="http://schemas.microsoft.com/office/drawing/2014/main" id="{74ABFEB6-1503-4EDF-E551-35A7157DBDDB}"/>
+                <a16:creationId xmlns:a16="http://schemas.microsoft.com/office/drawing/2014/main" id="{9B205849-6C22-DCAA-2B2C-40534D753081}"/>
               </a:ext>
             </a:extLst>
           </p:cNvPr>
@@ -6263,22 +6378,59 @@
         <p:spPr/>
         <p:txBody>
           <a:bodyPr>
-            <a:normAutofit/>
+            <a:noAutofit/>
           </a:bodyPr>
           <a:lstStyle/>
           <a:p>
             <a:r>
-              <a:rPr lang="ru-RU" sz="4000" b="1" dirty="0"/>
-              <a:t>Тестирование и надёжность</a:t>
-            </a:r>
-            <a:endParaRPr lang="ru-RU" sz="4000" dirty="0"/>
-          </a:p>
-        </p:txBody>
-      </p:sp>
+              <a:rPr lang="ru-RU" sz="3600" b="1" dirty="0"/>
+              <a:t>Диаграмма последовательности </a:t>
+            </a:r>
+            <a:br>
+              <a:rPr lang="ru-RU" sz="3600" b="1" dirty="0"/>
+            </a:br>
+            <a:r>
+              <a:rPr lang="ru-RU" sz="3600" b="1" dirty="0"/>
+              <a:t>— Загрузка списка</a:t>
+            </a:r>
+            <a:endParaRPr lang="ru-RU" sz="3600" dirty="0"/>
+          </a:p>
+        </p:txBody>
+      </p:sp>
+      <p:pic>
+        <p:nvPicPr>
+          <p:cNvPr id="6" name="Рисунок 5">
+            <a:extLst>
+              <a:ext uri="{FF2B5EF4-FFF2-40B4-BE49-F238E27FC236}">
+                <a16:creationId xmlns:a16="http://schemas.microsoft.com/office/drawing/2014/main" id="{AAB7853F-70E0-F6F2-CD21-F736B11DD546}"/>
+              </a:ext>
+            </a:extLst>
+          </p:cNvPr>
+          <p:cNvPicPr>
+            <a:picLocks noChangeAspect="1"/>
+          </p:cNvPicPr>
+          <p:nvPr/>
+        </p:nvPicPr>
+        <p:blipFill>
+          <a:blip r:embed="rId2"/>
+          <a:stretch>
+            <a:fillRect/>
+          </a:stretch>
+        </p:blipFill>
+        <p:spPr>
+          <a:xfrm>
+            <a:off x="838200" y="1930640"/>
+            <a:ext cx="10390898" cy="3860560"/>
+          </a:xfrm>
+          <a:prstGeom prst="rect">
+            <a:avLst/>
+          </a:prstGeom>
+        </p:spPr>
+      </p:pic>
     </p:spTree>
     <p:extLst>
       <p:ext uri="{BB962C8B-B14F-4D97-AF65-F5344CB8AC3E}">
-        <p14:creationId xmlns:p14="http://schemas.microsoft.com/office/powerpoint/2010/main" val="3943208776"/>
+        <p14:creationId xmlns:p14="http://schemas.microsoft.com/office/powerpoint/2010/main" val="2214250286"/>
       </p:ext>
     </p:extLst>
   </p:cSld>
